--- a/docs/SIH26123_EdgeFleet_OFFICIAL-6slide-Template.pptx
+++ b/docs/SIH26123_EdgeFleet_OFFICIAL-6slide-Template.pptx
@@ -872,7 +872,7 @@
           <a:lstStyle/>
           <a:p>
             <a:r>
-              <a:t>Feasibility and viability, including the parts we are not claiming. Be first to say that the radio, the obstacle sensing, battery drain and edge CPU time are simulated, that the kinematics is a grid, and that step_ms is a laptop clock proxy. Then the honest part that wins credibility: collisions are 2 under both policies in E1, and improvement is null because the baseline never finished - so we publish raw values and no percentage. The three cards are the only headline numbers in the deck: 72/51/85 ticks, 0 deadlocks, 0.09 ms. MEASURED panel values come from results/metrics.json; the LIVE panel is the current run in the browser and will differ tick for tick. For the radio sliders, results/degradation.json is the source: 40% loss still finishes 6/6 with no deadlock (93–125 ticks), while a 3-tick delay starves E1 to 3/6 without deadlocking - volunteer that number.</a:t>
+              <a:t>Feasibility and viability, including the parts we are not claiming. Be first to say that the radio, the obstacle sensing, battery drain and edge CPU time are simulated, that the kinematics is a grid, and that step_ms is a laptop clock proxy. Then the honest part that wins credibility: collisions are 0 vs 2 in E1 (0 vs 0 in E2, 0 vs 0 in E3) (UBPA vs stop-and-wait), and improvement is null because the baseline never finished - so we publish raw values and no percentage. The three cards are the only headline numbers in the deck: 93/50/99 ticks, 0 deadlocks, 0.09 ms. MEASURED panel values come from results/metrics.json; the LIVE panel is the current run in the browser and will differ tick for tick. For the radio sliders, results/degradation.json is the source: 40% loss still finishes 6/6 with no deadlock (137–196 ticks), a 3-tick delay finishes 6/6 at 103 ticks with 0 conflicts, and even 70% loss finishes in 141-213 ticks. Turn RC2 off and the 3-tick case finishes sooner (94 ticks) but with 3 intention conflicts instead of 0; turn all five fixes off and it stops at 3/6 jobs with 577 conflicts - that is the attribution, and it is in probe_26123_ablation.json.</a:t>
             </a:r>
           </a:p>
         </p:txBody>
@@ -1045,7 +1045,7 @@
           <a:lstStyle/>
           <a:p>
             <a:r>
-              <a:t>Impact and benefits. The side-by-side is the money shot: identical seed, identical map, identical tick - the only difference is the conflict policy. Left: 3/6 done, 0 deadlocks. Right: 0/6 done, 2 deadlocks, aisle frozen. Keep the language concrete: deadlock is downtime, so removing it is the return, and 6/6 vs 0/6 is the throughput statement. If a judge asks about distance rising for UBPA, answer it directly: the baseline's distance is low because it stops and never finishes the work. Then volunteer the collision caveat before they find it.</a:t>
+              <a:t>Impact and benefits. The side-by-side is the money shot: identical seed, identical map, identical tick - the only difference is the conflict policy. Left: 3/6 done, 0 deadlocks. Right: 0/6 done, 2 deadlocks, aisle frozen. Keep the language concrete: deadlock is downtime, so removing it is the return, and 6/6 vs 0/6 is the throughput statement. If the fleet-size question comes up, the measured answer is: 8 robots / 16 tasks finish on 5/5 seeds at 327 ticks, stop-and-wait 0/5, and the 6- and 10-robot cases finish too (5/5 and 5/5). If a judge asks about distance rising for UBPA, answer it directly: the baseline's distance is low because it stops and never finishes the work. Then volunteer the collision caveat before they find it.</a:t>
             </a:r>
           </a:p>
         </p:txBody>
@@ -6043,7 +6043,7 @@
                 </a:solidFill>
                 <a:latin typeface="Arial"/>
               </a:rPr>
-              <a:t>•  Measured at a 800-tick limit: stop-and-wait never completes an experiment; UBPA finishes E1 in 72 ticks, 6/6 tasks, 0 deadlocks.</a:t>
+              <a:t>•  Measured at a 800-tick limit: stop-and-wait never completes an experiment; UBPA finishes E1 in 93 ticks, 6/6 tasks, 0 deadlocks.</a:t>
             </a:r>
           </a:p>
           <a:p>
@@ -6415,7 +6415,7 @@
               </a:spcAft>
             </a:pPr>
             <a:r>
-              <a:rPr sz="1010" b="1">
+              <a:rPr sz="980" b="1">
                 <a:solidFill>
                   <a:srgbClr val="143A5E"/>
                 </a:solidFill>
@@ -6434,7 +6434,7 @@
               </a:spcAft>
             </a:pPr>
             <a:r>
-              <a:rPr sz="969" b="1">
+              <a:rPr sz="940" b="1">
                 <a:solidFill>
                   <a:srgbClr val="0B6EA8"/>
                 </a:solidFill>
@@ -6453,7 +6453,7 @@
               </a:spcAft>
             </a:pPr>
             <a:r>
-              <a:rPr sz="919" b="0">
+              <a:rPr sz="900" b="0">
                 <a:solidFill>
                   <a:srgbClr val="1A1A1A"/>
                 </a:solidFill>
@@ -6472,7 +6472,7 @@
               </a:spcAft>
             </a:pPr>
             <a:r>
-              <a:rPr sz="969" b="1">
+              <a:rPr sz="940" b="1">
                 <a:solidFill>
                   <a:srgbClr val="0B6EA8"/>
                 </a:solidFill>
@@ -6491,7 +6491,7 @@
               </a:spcAft>
             </a:pPr>
             <a:r>
-              <a:rPr sz="880" b="0">
+              <a:rPr sz="860" b="0">
                 <a:solidFill>
                   <a:srgbClr val="1A1A1A"/>
                 </a:solidFill>
@@ -6510,7 +6510,7 @@
               </a:spcAft>
             </a:pPr>
             <a:r>
-              <a:rPr sz="880" b="0">
+              <a:rPr sz="860" b="0">
                 <a:solidFill>
                   <a:srgbClr val="1A1A1A"/>
                 </a:solidFill>
@@ -6529,7 +6529,7 @@
               </a:spcAft>
             </a:pPr>
             <a:r>
-              <a:rPr sz="880" b="0">
+              <a:rPr sz="860" b="0">
                 <a:solidFill>
                   <a:srgbClr val="1A1A1A"/>
                 </a:solidFill>
@@ -6548,7 +6548,7 @@
               </a:spcAft>
             </a:pPr>
             <a:r>
-              <a:rPr sz="880" b="0">
+              <a:rPr sz="860" b="0">
                 <a:solidFill>
                   <a:srgbClr val="1A1A1A"/>
                 </a:solidFill>
@@ -6567,7 +6567,7 @@
               </a:spcAft>
             </a:pPr>
             <a:r>
-              <a:rPr sz="880" b="0">
+              <a:rPr sz="860" b="0">
                 <a:solidFill>
                   <a:srgbClr val="1A1A1A"/>
                 </a:solidFill>
@@ -6586,7 +6586,7 @@
               </a:spcAft>
             </a:pPr>
             <a:r>
-              <a:rPr sz="969" b="1">
+              <a:rPr sz="940" b="1">
                 <a:solidFill>
                   <a:srgbClr val="0B6EA8"/>
                 </a:solidFill>
@@ -6605,7 +6605,7 @@
               </a:spcAft>
             </a:pPr>
             <a:r>
-              <a:rPr sz="880" b="0">
+              <a:rPr sz="860" b="0">
                 <a:solidFill>
                   <a:srgbClr val="1A1A1A"/>
                 </a:solidFill>
@@ -6624,13 +6624,13 @@
               </a:spcAft>
             </a:pPr>
             <a:r>
-              <a:rPr sz="880" b="0">
+              <a:rPr sz="860" b="0">
                 <a:solidFill>
                   <a:srgbClr val="1A1A1A"/>
                 </a:solidFill>
                 <a:latin typeface="Arial"/>
               </a:rPr>
-              <a:t>•  Degraded radio is measured, not assumed (results/degradation.json): at 40% packet loss the same 6/6 jobs still finish with 0 deadlocks — just later (93–125 ticks vs 72 clean); at 70% loss only 1–5/6 jobs land.</a:t>
+              <a:t>•  Degraded radio is measured, not assumed (results/degradation.json): at 40% packet loss the same 6/6 jobs still finish with 0 deadlocks — just later (137–196 ticks vs 93 clean); at 70% loss the fleet still finishes 6/6 in 141–213 ticks; and the fleet sweep finishes 8 robots / 16 tasks finish on 5/5 seeds at 327 ticks.</a:t>
             </a:r>
           </a:p>
           <a:p>
@@ -6643,7 +6643,7 @@
               </a:spcAft>
             </a:pPr>
             <a:r>
-              <a:rPr sz="969" b="1">
+              <a:rPr sz="940" b="1">
                 <a:solidFill>
                   <a:srgbClr val="0B6EA8"/>
                 </a:solidFill>
@@ -6662,7 +6662,7 @@
               </a:spcAft>
             </a:pPr>
             <a:r>
-              <a:rPr sz="880" b="0">
+              <a:rPr sz="860" b="0">
                 <a:solidFill>
                   <a:srgbClr val="1A1A1A"/>
                 </a:solidFill>
@@ -6681,7 +6681,7 @@
               </a:spcAft>
             </a:pPr>
             <a:r>
-              <a:rPr sz="880" b="0">
+              <a:rPr sz="860" b="0">
                 <a:solidFill>
                   <a:srgbClr val="1A1A1A"/>
                 </a:solidFill>
@@ -6700,7 +6700,7 @@
               </a:spcAft>
             </a:pPr>
             <a:r>
-              <a:rPr sz="880" b="0">
+              <a:rPr sz="860" b="0">
                 <a:solidFill>
                   <a:srgbClr val="1A1A1A"/>
                 </a:solidFill>
@@ -8971,7 +8971,7 @@
                 </a:solidFill>
                 <a:latin typeface="Arial"/>
               </a:rPr>
-              <a:t>72 · 51 · 85</a:t>
+              <a:t>93 · 50 · 99</a:t>
             </a:r>
           </a:p>
           <a:p>
@@ -9244,7 +9244,7 @@
               </a:spcAft>
             </a:pPr>
             <a:r>
-              <a:rPr sz="940" b="1">
+              <a:rPr sz="850" b="1">
                 <a:solidFill>
                   <a:srgbClr val="0B6EA8"/>
                 </a:solidFill>
@@ -9263,7 +9263,7 @@
               </a:spcAft>
             </a:pPr>
             <a:r>
-              <a:rPr sz="860" b="0">
+              <a:rPr sz="780" b="0">
                 <a:solidFill>
                   <a:srgbClr val="1A1A1A"/>
                 </a:solidFill>
@@ -9282,7 +9282,7 @@
               </a:spcAft>
             </a:pPr>
             <a:r>
-              <a:rPr sz="860" b="0">
+              <a:rPr sz="780" b="0">
                 <a:solidFill>
                   <a:srgbClr val="1A1A1A"/>
                 </a:solidFill>
@@ -9301,7 +9301,7 @@
               </a:spcAft>
             </a:pPr>
             <a:r>
-              <a:rPr sz="860" b="0">
+              <a:rPr sz="780" b="0">
                 <a:solidFill>
                   <a:srgbClr val="1A1A1A"/>
                 </a:solidFill>
@@ -9320,7 +9320,7 @@
               </a:spcAft>
             </a:pPr>
             <a:r>
-              <a:rPr sz="860" b="0">
+              <a:rPr sz="780" b="0">
                 <a:solidFill>
                   <a:srgbClr val="1A1A1A"/>
                 </a:solidFill>
@@ -9339,7 +9339,7 @@
               </a:spcAft>
             </a:pPr>
             <a:r>
-              <a:rPr sz="940" b="1">
+              <a:rPr sz="850" b="1">
                 <a:solidFill>
                   <a:srgbClr val="0B6EA8"/>
                 </a:solidFill>
@@ -9358,7 +9358,7 @@
               </a:spcAft>
             </a:pPr>
             <a:r>
-              <a:rPr sz="860" b="0">
+              <a:rPr sz="780" b="0">
                 <a:solidFill>
                   <a:srgbClr val="1A1A1A"/>
                 </a:solidFill>
@@ -9377,13 +9377,13 @@
               </a:spcAft>
             </a:pPr>
             <a:r>
-              <a:rPr sz="860" b="0">
+              <a:rPr sz="780" b="0">
                 <a:solidFill>
                   <a:srgbClr val="1A1A1A"/>
                 </a:solidFill>
                 <a:latin typeface="Arial"/>
               </a:rPr>
-              <a:t>•  collision_count is 2 under BOTH policies in E1 (0 vs 1 in E2), so we claim no collision-safety win — the measured win is deadlock removal and completion.</a:t>
+              <a:t>•  Collisions are disclosed per experiment, not averaged away: 0 vs 2 in E1 (0 vs 0 in E2, 0 vs 0 in E3) (UBPA vs stop-and-wait). The measured win is deadlock removal and completion, never an absolute safety guarantee.</a:t>
             </a:r>
           </a:p>
           <a:p>
@@ -9396,13 +9396,13 @@
               </a:spcAft>
             </a:pPr>
             <a:r>
-              <a:rPr sz="860" b="0">
+              <a:rPr sz="780" b="0">
                 <a:solidFill>
                   <a:srgbClr val="1A1A1A"/>
                 </a:solidFill>
                 <a:latin typeface="Arial"/>
               </a:rPr>
-              <a:t>•  The failure mode is measured too: at 3 ticks of radio delay the fleet still never deadlocks, but only 3/6 E1 jobs finish and intention conflicts rise to 577 — PEER_STALE_TICKS = 6 still trusts a 3-tick-stale path. Roadmap fix: age-filter peer reservations.</a:t>
+              <a:t>•  Radio delay is the case that justified one fix, and the trade-off is published: with age-filtered peer reservations off (RC2) a 3-tick delay still finishes 6/6 but at 94 ticks with 3 intention conflicts, because PEER_STALE_TICKS = 6 still trusted a 3-tick-stale path. Shipping RC2 costs those 9 ticks and removes the conflicts: 103 ticks, 0 conflicts. With all five fixes off the same delay stops at 3/6 tasks with 577 conflicts.</a:t>
             </a:r>
           </a:p>
           <a:p>
@@ -9415,12 +9415,31 @@
               </a:spcAft>
             </a:pPr>
             <a:r>
-              <a:rPr sz="860" b="0">
+              <a:rPr sz="780" b="0">
                 <a:solidFill>
                   <a:srgbClr val="1A1A1A"/>
                 </a:solidFill>
                 <a:latin typeface="Arial"/>
               </a:rPr>
+              <a:t>•  Scale ceiling is measured, not extrapolated: 3/6/8/10 robots (6/12/16/20 tasks) all finish, but the 8 robots / 16 tasks finish on 5/5 seeds at 327 ticks and the 8-robot case only stays alive because of RC5 — with RC5 off it stops at 14/16 tasks with 37 deadlocks. No 40-robot claim is made.</a:t>
+            </a:r>
+          </a:p>
+          <a:p>
+            <a:pPr marL="146304" indent="-146304">
+              <a:spcBef>
+                <a:spcPts val="0"/>
+              </a:spcBef>
+              <a:spcAft>
+                <a:spcPts val="250"/>
+              </a:spcAft>
+            </a:pPr>
+            <a:r>
+              <a:rPr sz="780" b="0">
+                <a:solidFill>
+                  <a:srgbClr val="1A1A1A"/>
+                </a:solidFill>
+                <a:latin typeface="Arial"/>
+              </a:rPr>
               <a:t>•  No percentage speed-up is published: the baseline never finished inside the 800-tick limit, so improvement is null and comparable is false. Tuning weights live in docs/methodology.md and are re-tuned per site.</a:t>
             </a:r>
           </a:p>
@@ -9434,7 +9453,7 @@
               </a:spcAft>
             </a:pPr>
             <a:r>
-              <a:rPr sz="940" b="1">
+              <a:rPr sz="850" b="1">
                 <a:solidFill>
                   <a:srgbClr val="0B6EA8"/>
                 </a:solidFill>
@@ -9453,7 +9472,7 @@
               </a:spcAft>
             </a:pPr>
             <a:r>
-              <a:rPr sz="860" b="0">
+              <a:rPr sz="780" b="0">
                 <a:solidFill>
                   <a:srgbClr val="1A1A1A"/>
                 </a:solidFill>
@@ -9472,7 +9491,7 @@
               </a:spcAft>
             </a:pPr>
             <a:r>
-              <a:rPr sz="860" b="0">
+              <a:rPr sz="780" b="0">
                 <a:solidFill>
                   <a:srgbClr val="1A1A1A"/>
                 </a:solidFill>
@@ -9491,7 +9510,7 @@
               </a:spcAft>
             </a:pPr>
             <a:r>
-              <a:rPr sz="860" b="0">
+              <a:rPr sz="780" b="0">
                 <a:solidFill>
                   <a:srgbClr val="1A1A1A"/>
                 </a:solidFill>
@@ -10288,7 +10307,7 @@
                 </a:solidFill>
                 <a:latin typeface="Arial"/>
               </a:rPr>
-              <a:t>•  Economic — throughput: 6/6 tasks vs 0/6 in E1, and a blocked aisle recovered in 85 ticks instead of never. Deadlock is downtime, so removing it is the return.</a:t>
+              <a:t>•  Economic — throughput: 6/6 tasks vs 0/6 in E1, and a blocked aisle recovered in 99 ticks instead of never. Deadlock is downtime, so removing it is the return.</a:t>
             </a:r>
           </a:p>
           <a:p>
@@ -10326,7 +10345,7 @@
                 </a:solidFill>
                 <a:latin typeface="Arial"/>
               </a:rPr>
-              <a:t>•  Operational — degradation is bounded and measured: at 40% packet loss the fleet still finishes 6/6 with 0 deadlocks (93–125 ticks vs 72), and at 3 ticks of delay it starves but still never deadlocks.</a:t>
+              <a:t>•  Operational — degradation is bounded and measured: at 40% packet loss the fleet still finishes 6/6 with 0 deadlocks (137–196 ticks vs 93), at 3 ticks of delay it finishes in 103 ticks with 0 conflicts, and 8 robots / 16 tasks finish on 5/5 seeds at 327 ticks.</a:t>
             </a:r>
           </a:p>
           <a:p>
@@ -10756,7 +10775,7 @@
                 </a:solidFill>
                 <a:latin typeface="Arial"/>
               </a:rPr>
-              <a:t>•  E1 throughput, 5 seeds: UBPA finishes at tick 72 with 6/6 tasks and 0 deadlocks; stop-and-wait hits the 800-tick limit with 0/6 tasks and 2 deadlocks.</a:t>
+              <a:t>•  E1 throughput, 5 seeds: UBPA finishes at tick 93 with 6/6 tasks and 0 deadlocks; stop-and-wait hits the 800-tick limit with 0/6 tasks and 2 deadlocks.</a:t>
             </a:r>
           </a:p>
           <a:p>
@@ -10775,7 +10794,7 @@
                 </a:solidFill>
                 <a:latin typeface="Arial"/>
               </a:rPr>
-              <a:t>•  E3, aisle blocked at tick 16: UBPA recovers in 85 ticks with 6/6 tasks and 0 deadlocks; the baseline strands at 3/6 with 3 deadlocks.</a:t>
+              <a:t>•  E3, aisle blocked at tick 16: UBPA recovers in 99 ticks with 6/6 tasks and 0 deadlocks; the baseline strands at 3/6 with 3 deadlocks.</a:t>
             </a:r>
           </a:p>
           <a:p>
@@ -10794,7 +10813,7 @@
                 </a:solidFill>
                 <a:latin typeface="Arial"/>
               </a:rPr>
-              <a:t>•  Disclosed, not hidden: collisions are 2 under both policies in E1 (0 vs 1 in E2). We claim deadlock removal and completion — not a collision-safety win.</a:t>
+              <a:t>•  Disclosed, not hidden: collisions per experiment are 0 vs 2 in E1 (0 vs 0 in E2, 0 vs 0 in E3) (UBPA vs stop-and-wait). We claim deadlock removal and completion — not a collision-safety win.</a:t>
             </a:r>
           </a:p>
         </p:txBody>
